--- a/assets/Contract-Legal-Intelligence-Agent-What-Why-How-Results.pptx
+++ b/assets/Contract-Legal-Intelligence-Agent-What-Why-How-Results.pptx
@@ -833,7 +833,7 @@
                 <a:ea typeface="Aptos" pitchFamily="34" charset="-122"/>
                 <a:cs typeface="Aptos" pitchFamily="34" charset="-120"/>
               </a:rPr>
-              <a:t>SALES IN ACTION - SE TRACK - 90-MIN DEMO</a:t>
+              <a:t>SALES IN ACTION - SE TRACK - 90-MIN LAB</a:t>
             </a:r>
             <a:endParaRPr lang="en-US" sz="1050" dirty="0"/>
           </a:p>
@@ -1450,7 +1450,7 @@
                 <a:ea typeface="Aptos" pitchFamily="34" charset="-122"/>
                 <a:cs typeface="Aptos" pitchFamily="34" charset="-120"/>
               </a:rPr>
-              <a:t>Deliverable: working demo pattern</a:t>
+              <a:t>Deliverable: working lab pattern</a:t>
             </a:r>
             <a:endParaRPr lang="en-US" sz="860" dirty="0"/>
           </a:p>
